--- a/doc-mk/DP3/DP3-slides-draft.pptx
+++ b/doc-mk/DP3/DP3-slides-draft.pptx
@@ -9547,7 +9547,7 @@
                 <a:latin typeface="맑은 고딕"/>
                 <a:ea typeface="맑은 고딕"/>
               </a:rPr>
-              <a:t>Prefill 실행 위치 = DP2</a:t>
+              <a:t>Prefill/Decode 실행 위치 = DP2</a:t>
             </a:r>
           </a:p>
         </p:txBody>
